--- a/AegisPath_Enterprise_Major_Project_Presentation.pptx
+++ b/AegisPath_Enterprise_Major_Project_Presentation.pptx
@@ -6683,7 +6683,7 @@
                 <a:cs typeface="Roboto"/>
                 <a:sym typeface="Roboto"/>
               </a:rPr>
-              <a:t>Enrollment: 233CS0188 | Department of Computer Science &amp; Engineering</a:t>
+              <a:t>Enrollment: 233CSF010 | Dept of CSE | Guide: Mr. Dhananjay Kumar Prasad</a:t>
             </a:r>
             <a:endParaRPr sz="1000">
               <a:solidFill>
